--- a/slides/TP557_14b_introducao_arduinoble.pptx
+++ b/slides/TP557_14b_introducao_arduinoble.pptx
@@ -212,7 +212,7 @@
           <a:p>
             <a:fld id="{144F1436-6906-4D93-B7A2-786C327BFA14}" type="datetimeFigureOut">
               <a:rPr lang="nl-BE" smtClean="0"/>
-              <a:t>25/10/2023</a:t>
+              <a:t>19/04/2025</a:t>
             </a:fld>
             <a:endParaRPr lang="nl-BE"/>
           </a:p>
@@ -377,7 +377,7 @@
           <a:p>
             <a:fld id="{AA8CD09E-2914-4F47-B6C1-51B2C31814C9}" type="datetimeFigureOut">
               <a:rPr lang="pt-BR" smtClean="0"/>
-              <a:t>25/10/2023</a:t>
+              <a:t>19/04/2025</a:t>
             </a:fld>
             <a:endParaRPr lang="pt-BR"/>
           </a:p>
@@ -1674,7 +1674,7 @@
           <p:cNvPr id="2" name="Título 1">
             <a:extLst>
               <a:ext uri="{FF2B5EF4-FFF2-40B4-BE49-F238E27FC236}">
-                <a16:creationId xmlns:a16="http://schemas.microsoft.com/office/drawing/2014/main" id="{1DB9B4FF-B06E-403C-A326-BDC64D8FF94E}"/>
+                <a16:creationId xmlns:a16="http://schemas.microsoft.com/office/drawing/2014/main" xmlns="" id="{1DB9B4FF-B06E-403C-A326-BDC64D8FF94E}"/>
               </a:ext>
             </a:extLst>
           </p:cNvPr>
@@ -1711,7 +1711,7 @@
           <p:cNvPr id="3" name="Subtítulo 2">
             <a:extLst>
               <a:ext uri="{FF2B5EF4-FFF2-40B4-BE49-F238E27FC236}">
-                <a16:creationId xmlns:a16="http://schemas.microsoft.com/office/drawing/2014/main" id="{247BDFCE-746E-45BF-A319-4733D58D1632}"/>
+                <a16:creationId xmlns:a16="http://schemas.microsoft.com/office/drawing/2014/main" xmlns="" id="{247BDFCE-746E-45BF-A319-4733D58D1632}"/>
               </a:ext>
             </a:extLst>
           </p:cNvPr>
@@ -1781,7 +1781,7 @@
           <p:cNvPr id="4" name="Espaço Reservado para Data 3">
             <a:extLst>
               <a:ext uri="{FF2B5EF4-FFF2-40B4-BE49-F238E27FC236}">
-                <a16:creationId xmlns:a16="http://schemas.microsoft.com/office/drawing/2014/main" id="{9EDE2778-5372-4104-B96D-968184DA8288}"/>
+                <a16:creationId xmlns:a16="http://schemas.microsoft.com/office/drawing/2014/main" xmlns="" id="{9EDE2778-5372-4104-B96D-968184DA8288}"/>
               </a:ext>
             </a:extLst>
           </p:cNvPr>
@@ -1799,7 +1799,7 @@
           <a:p>
             <a:fld id="{63289F7E-B80B-496E-81B4-D396C37C9454}" type="datetimeFigureOut">
               <a:rPr lang="pt-BR" smtClean="0"/>
-              <a:t>25/10/2023</a:t>
+              <a:t>19/04/2025</a:t>
             </a:fld>
             <a:endParaRPr lang="pt-BR"/>
           </a:p>
@@ -1810,7 +1810,7 @@
           <p:cNvPr id="5" name="Espaço Reservado para Rodapé 4">
             <a:extLst>
               <a:ext uri="{FF2B5EF4-FFF2-40B4-BE49-F238E27FC236}">
-                <a16:creationId xmlns:a16="http://schemas.microsoft.com/office/drawing/2014/main" id="{C1DD0F41-C861-4051-988D-3024A37A4B93}"/>
+                <a16:creationId xmlns:a16="http://schemas.microsoft.com/office/drawing/2014/main" xmlns="" id="{C1DD0F41-C861-4051-988D-3024A37A4B93}"/>
               </a:ext>
             </a:extLst>
           </p:cNvPr>
@@ -1835,7 +1835,7 @@
           <p:cNvPr id="6" name="Espaço Reservado para Número de Slide 5">
             <a:extLst>
               <a:ext uri="{FF2B5EF4-FFF2-40B4-BE49-F238E27FC236}">
-                <a16:creationId xmlns:a16="http://schemas.microsoft.com/office/drawing/2014/main" id="{07E5967E-D980-431A-A5DB-3F0C5030A81E}"/>
+                <a16:creationId xmlns:a16="http://schemas.microsoft.com/office/drawing/2014/main" xmlns="" id="{07E5967E-D980-431A-A5DB-3F0C5030A81E}"/>
               </a:ext>
             </a:extLst>
           </p:cNvPr>
@@ -1894,7 +1894,7 @@
           <p:cNvPr id="2" name="Título 1">
             <a:extLst>
               <a:ext uri="{FF2B5EF4-FFF2-40B4-BE49-F238E27FC236}">
-                <a16:creationId xmlns:a16="http://schemas.microsoft.com/office/drawing/2014/main" id="{9036C49F-3E68-4175-81BA-3C3FEE44308A}"/>
+                <a16:creationId xmlns:a16="http://schemas.microsoft.com/office/drawing/2014/main" xmlns="" id="{9036C49F-3E68-4175-81BA-3C3FEE44308A}"/>
               </a:ext>
             </a:extLst>
           </p:cNvPr>
@@ -1922,7 +1922,7 @@
           <p:cNvPr id="3" name="Espaço Reservado para Texto Vertical 2">
             <a:extLst>
               <a:ext uri="{FF2B5EF4-FFF2-40B4-BE49-F238E27FC236}">
-                <a16:creationId xmlns:a16="http://schemas.microsoft.com/office/drawing/2014/main" id="{426FA736-3DD3-4D4E-B57B-BBE1D8F7D424}"/>
+                <a16:creationId xmlns:a16="http://schemas.microsoft.com/office/drawing/2014/main" xmlns="" id="{426FA736-3DD3-4D4E-B57B-BBE1D8F7D424}"/>
               </a:ext>
             </a:extLst>
           </p:cNvPr>
@@ -1979,7 +1979,7 @@
           <p:cNvPr id="4" name="Espaço Reservado para Data 3">
             <a:extLst>
               <a:ext uri="{FF2B5EF4-FFF2-40B4-BE49-F238E27FC236}">
-                <a16:creationId xmlns:a16="http://schemas.microsoft.com/office/drawing/2014/main" id="{99E8855C-D8FD-48F6-B14E-861E0DE4D915}"/>
+                <a16:creationId xmlns:a16="http://schemas.microsoft.com/office/drawing/2014/main" xmlns="" id="{99E8855C-D8FD-48F6-B14E-861E0DE4D915}"/>
               </a:ext>
             </a:extLst>
           </p:cNvPr>
@@ -1997,7 +1997,7 @@
           <a:p>
             <a:fld id="{63289F7E-B80B-496E-81B4-D396C37C9454}" type="datetimeFigureOut">
               <a:rPr lang="pt-BR" smtClean="0"/>
-              <a:t>25/10/2023</a:t>
+              <a:t>19/04/2025</a:t>
             </a:fld>
             <a:endParaRPr lang="pt-BR"/>
           </a:p>
@@ -2008,7 +2008,7 @@
           <p:cNvPr id="5" name="Espaço Reservado para Rodapé 4">
             <a:extLst>
               <a:ext uri="{FF2B5EF4-FFF2-40B4-BE49-F238E27FC236}">
-                <a16:creationId xmlns:a16="http://schemas.microsoft.com/office/drawing/2014/main" id="{97C0BB88-2F21-42A5-ACFF-83DA47F2D340}"/>
+                <a16:creationId xmlns:a16="http://schemas.microsoft.com/office/drawing/2014/main" xmlns="" id="{97C0BB88-2F21-42A5-ACFF-83DA47F2D340}"/>
               </a:ext>
             </a:extLst>
           </p:cNvPr>
@@ -2033,7 +2033,7 @@
           <p:cNvPr id="6" name="Espaço Reservado para Número de Slide 5">
             <a:extLst>
               <a:ext uri="{FF2B5EF4-FFF2-40B4-BE49-F238E27FC236}">
-                <a16:creationId xmlns:a16="http://schemas.microsoft.com/office/drawing/2014/main" id="{6CB462B3-1F22-4C05-B4B8-7A279FB7D5E9}"/>
+                <a16:creationId xmlns:a16="http://schemas.microsoft.com/office/drawing/2014/main" xmlns="" id="{6CB462B3-1F22-4C05-B4B8-7A279FB7D5E9}"/>
               </a:ext>
             </a:extLst>
           </p:cNvPr>
@@ -2092,7 +2092,7 @@
           <p:cNvPr id="2" name="Título Vertical 1">
             <a:extLst>
               <a:ext uri="{FF2B5EF4-FFF2-40B4-BE49-F238E27FC236}">
-                <a16:creationId xmlns:a16="http://schemas.microsoft.com/office/drawing/2014/main" id="{EAEAB728-701C-4207-A9D5-23FF45C60502}"/>
+                <a16:creationId xmlns:a16="http://schemas.microsoft.com/office/drawing/2014/main" xmlns="" id="{EAEAB728-701C-4207-A9D5-23FF45C60502}"/>
               </a:ext>
             </a:extLst>
           </p:cNvPr>
@@ -2125,7 +2125,7 @@
           <p:cNvPr id="3" name="Espaço Reservado para Texto Vertical 2">
             <a:extLst>
               <a:ext uri="{FF2B5EF4-FFF2-40B4-BE49-F238E27FC236}">
-                <a16:creationId xmlns:a16="http://schemas.microsoft.com/office/drawing/2014/main" id="{BA8C8CCF-7823-480A-9A19-0F664DD17E3B}"/>
+                <a16:creationId xmlns:a16="http://schemas.microsoft.com/office/drawing/2014/main" xmlns="" id="{BA8C8CCF-7823-480A-9A19-0F664DD17E3B}"/>
               </a:ext>
             </a:extLst>
           </p:cNvPr>
@@ -2187,7 +2187,7 @@
           <p:cNvPr id="4" name="Espaço Reservado para Data 3">
             <a:extLst>
               <a:ext uri="{FF2B5EF4-FFF2-40B4-BE49-F238E27FC236}">
-                <a16:creationId xmlns:a16="http://schemas.microsoft.com/office/drawing/2014/main" id="{721D5734-7B1F-425D-942F-6EB73344027C}"/>
+                <a16:creationId xmlns:a16="http://schemas.microsoft.com/office/drawing/2014/main" xmlns="" id="{721D5734-7B1F-425D-942F-6EB73344027C}"/>
               </a:ext>
             </a:extLst>
           </p:cNvPr>
@@ -2205,7 +2205,7 @@
           <a:p>
             <a:fld id="{63289F7E-B80B-496E-81B4-D396C37C9454}" type="datetimeFigureOut">
               <a:rPr lang="pt-BR" smtClean="0"/>
-              <a:t>25/10/2023</a:t>
+              <a:t>19/04/2025</a:t>
             </a:fld>
             <a:endParaRPr lang="pt-BR"/>
           </a:p>
@@ -2216,7 +2216,7 @@
           <p:cNvPr id="5" name="Espaço Reservado para Rodapé 4">
             <a:extLst>
               <a:ext uri="{FF2B5EF4-FFF2-40B4-BE49-F238E27FC236}">
-                <a16:creationId xmlns:a16="http://schemas.microsoft.com/office/drawing/2014/main" id="{1E1AAEAC-F08D-45FE-89EC-B1B349A868C9}"/>
+                <a16:creationId xmlns:a16="http://schemas.microsoft.com/office/drawing/2014/main" xmlns="" id="{1E1AAEAC-F08D-45FE-89EC-B1B349A868C9}"/>
               </a:ext>
             </a:extLst>
           </p:cNvPr>
@@ -2241,7 +2241,7 @@
           <p:cNvPr id="6" name="Espaço Reservado para Número de Slide 5">
             <a:extLst>
               <a:ext uri="{FF2B5EF4-FFF2-40B4-BE49-F238E27FC236}">
-                <a16:creationId xmlns:a16="http://schemas.microsoft.com/office/drawing/2014/main" id="{BAA44493-9911-47B2-87A6-C2141A972BC8}"/>
+                <a16:creationId xmlns:a16="http://schemas.microsoft.com/office/drawing/2014/main" xmlns="" id="{BAA44493-9911-47B2-87A6-C2141A972BC8}"/>
               </a:ext>
             </a:extLst>
           </p:cNvPr>
@@ -2460,7 +2460,7 @@
             <a:fld id="{1D8BD707-D9CF-40AE-B4C6-C98DA3205C09}" type="datetimeFigureOut">
               <a:rPr lang="en-US" smtClean="0"/>
               <a:pPr/>
-              <a:t>10/25/2023</a:t>
+              <a:t>4/19/2025</a:t>
             </a:fld>
             <a:endParaRPr lang="en-US"/>
           </a:p>
@@ -2632,7 +2632,7 @@
             <a:fld id="{1D8BD707-D9CF-40AE-B4C6-C98DA3205C09}" type="datetimeFigureOut">
               <a:rPr lang="en-US" smtClean="0"/>
               <a:pPr/>
-              <a:t>10/25/2023</a:t>
+              <a:t>4/19/2025</a:t>
             </a:fld>
             <a:endParaRPr lang="en-US"/>
           </a:p>
@@ -2880,7 +2880,7 @@
             <a:fld id="{1D8BD707-D9CF-40AE-B4C6-C98DA3205C09}" type="datetimeFigureOut">
               <a:rPr lang="en-US" smtClean="0"/>
               <a:pPr/>
-              <a:t>10/25/2023</a:t>
+              <a:t>4/19/2025</a:t>
             </a:fld>
             <a:endParaRPr lang="en-US"/>
           </a:p>
@@ -3170,7 +3170,7 @@
             <a:fld id="{1D8BD707-D9CF-40AE-B4C6-C98DA3205C09}" type="datetimeFigureOut">
               <a:rPr lang="en-US" smtClean="0"/>
               <a:pPr/>
-              <a:t>10/25/2023</a:t>
+              <a:t>4/19/2025</a:t>
             </a:fld>
             <a:endParaRPr lang="en-US"/>
           </a:p>
@@ -3594,7 +3594,7 @@
             <a:fld id="{1D8BD707-D9CF-40AE-B4C6-C98DA3205C09}" type="datetimeFigureOut">
               <a:rPr lang="en-US" smtClean="0"/>
               <a:pPr/>
-              <a:t>10/25/2023</a:t>
+              <a:t>4/19/2025</a:t>
             </a:fld>
             <a:endParaRPr lang="en-US"/>
           </a:p>
@@ -3714,7 +3714,7 @@
             <a:fld id="{1D8BD707-D9CF-40AE-B4C6-C98DA3205C09}" type="datetimeFigureOut">
               <a:rPr lang="en-US" smtClean="0"/>
               <a:pPr/>
-              <a:t>10/25/2023</a:t>
+              <a:t>4/19/2025</a:t>
             </a:fld>
             <a:endParaRPr lang="en-US"/>
           </a:p>
@@ -3811,7 +3811,7 @@
             <a:fld id="{1D8BD707-D9CF-40AE-B4C6-C98DA3205C09}" type="datetimeFigureOut">
               <a:rPr lang="en-US" smtClean="0"/>
               <a:pPr/>
-              <a:t>10/25/2023</a:t>
+              <a:t>4/19/2025</a:t>
             </a:fld>
             <a:endParaRPr lang="en-US"/>
           </a:p>
@@ -4090,7 +4090,7 @@
             <a:fld id="{1D8BD707-D9CF-40AE-B4C6-C98DA3205C09}" type="datetimeFigureOut">
               <a:rPr lang="en-US" smtClean="0"/>
               <a:pPr/>
-              <a:t>10/25/2023</a:t>
+              <a:t>4/19/2025</a:t>
             </a:fld>
             <a:endParaRPr lang="en-US"/>
           </a:p>
@@ -4174,7 +4174,7 @@
           <p:cNvPr id="2" name="Título 1">
             <a:extLst>
               <a:ext uri="{FF2B5EF4-FFF2-40B4-BE49-F238E27FC236}">
-                <a16:creationId xmlns:a16="http://schemas.microsoft.com/office/drawing/2014/main" id="{71BD44A5-8F21-4626-A01D-48A1C874B1D5}"/>
+                <a16:creationId xmlns:a16="http://schemas.microsoft.com/office/drawing/2014/main" xmlns="" id="{71BD44A5-8F21-4626-A01D-48A1C874B1D5}"/>
               </a:ext>
             </a:extLst>
           </p:cNvPr>
@@ -4202,7 +4202,7 @@
           <p:cNvPr id="3" name="Espaço Reservado para Conteúdo 2">
             <a:extLst>
               <a:ext uri="{FF2B5EF4-FFF2-40B4-BE49-F238E27FC236}">
-                <a16:creationId xmlns:a16="http://schemas.microsoft.com/office/drawing/2014/main" id="{B79E8085-65A9-48AA-951D-71D978BFF4ED}"/>
+                <a16:creationId xmlns:a16="http://schemas.microsoft.com/office/drawing/2014/main" xmlns="" id="{B79E8085-65A9-48AA-951D-71D978BFF4ED}"/>
               </a:ext>
             </a:extLst>
           </p:cNvPr>
@@ -4259,7 +4259,7 @@
           <p:cNvPr id="4" name="Espaço Reservado para Data 3">
             <a:extLst>
               <a:ext uri="{FF2B5EF4-FFF2-40B4-BE49-F238E27FC236}">
-                <a16:creationId xmlns:a16="http://schemas.microsoft.com/office/drawing/2014/main" id="{F05BE1AF-51EA-425D-B188-DE7BD675009F}"/>
+                <a16:creationId xmlns:a16="http://schemas.microsoft.com/office/drawing/2014/main" xmlns="" id="{F05BE1AF-51EA-425D-B188-DE7BD675009F}"/>
               </a:ext>
             </a:extLst>
           </p:cNvPr>
@@ -4277,7 +4277,7 @@
           <a:p>
             <a:fld id="{63289F7E-B80B-496E-81B4-D396C37C9454}" type="datetimeFigureOut">
               <a:rPr lang="pt-BR" smtClean="0"/>
-              <a:t>25/10/2023</a:t>
+              <a:t>19/04/2025</a:t>
             </a:fld>
             <a:endParaRPr lang="pt-BR"/>
           </a:p>
@@ -4288,7 +4288,7 @@
           <p:cNvPr id="5" name="Espaço Reservado para Rodapé 4">
             <a:extLst>
               <a:ext uri="{FF2B5EF4-FFF2-40B4-BE49-F238E27FC236}">
-                <a16:creationId xmlns:a16="http://schemas.microsoft.com/office/drawing/2014/main" id="{121BE632-29CF-4CB9-B365-C9EF38F89BE6}"/>
+                <a16:creationId xmlns:a16="http://schemas.microsoft.com/office/drawing/2014/main" xmlns="" id="{121BE632-29CF-4CB9-B365-C9EF38F89BE6}"/>
               </a:ext>
             </a:extLst>
           </p:cNvPr>
@@ -4313,7 +4313,7 @@
           <p:cNvPr id="6" name="Espaço Reservado para Número de Slide 5">
             <a:extLst>
               <a:ext uri="{FF2B5EF4-FFF2-40B4-BE49-F238E27FC236}">
-                <a16:creationId xmlns:a16="http://schemas.microsoft.com/office/drawing/2014/main" id="{60CF3DD1-9AEC-4A57-B461-4E4DD86FAC18}"/>
+                <a16:creationId xmlns:a16="http://schemas.microsoft.com/office/drawing/2014/main" xmlns="" id="{60CF3DD1-9AEC-4A57-B461-4E4DD86FAC18}"/>
               </a:ext>
             </a:extLst>
           </p:cNvPr>
@@ -4547,7 +4547,7 @@
             <a:fld id="{1D8BD707-D9CF-40AE-B4C6-C98DA3205C09}" type="datetimeFigureOut">
               <a:rPr lang="en-US" smtClean="0"/>
               <a:pPr/>
-              <a:t>10/25/2023</a:t>
+              <a:t>4/19/2025</a:t>
             </a:fld>
             <a:endParaRPr lang="en-US"/>
           </a:p>
@@ -4719,7 +4719,7 @@
             <a:fld id="{1D8BD707-D9CF-40AE-B4C6-C98DA3205C09}" type="datetimeFigureOut">
               <a:rPr lang="en-US" smtClean="0"/>
               <a:pPr/>
-              <a:t>10/25/2023</a:t>
+              <a:t>4/19/2025</a:t>
             </a:fld>
             <a:endParaRPr lang="en-US"/>
           </a:p>
@@ -4901,7 +4901,7 @@
             <a:fld id="{1D8BD707-D9CF-40AE-B4C6-C98DA3205C09}" type="datetimeFigureOut">
               <a:rPr lang="en-US" smtClean="0"/>
               <a:pPr/>
-              <a:t>10/25/2023</a:t>
+              <a:t>4/19/2025</a:t>
             </a:fld>
             <a:endParaRPr lang="en-US"/>
           </a:p>
@@ -4985,7 +4985,7 @@
           <p:cNvPr id="2" name="Título 1">
             <a:extLst>
               <a:ext uri="{FF2B5EF4-FFF2-40B4-BE49-F238E27FC236}">
-                <a16:creationId xmlns:a16="http://schemas.microsoft.com/office/drawing/2014/main" id="{34AB2FF0-A4D7-4E28-991D-FF26140D5988}"/>
+                <a16:creationId xmlns:a16="http://schemas.microsoft.com/office/drawing/2014/main" xmlns="" id="{34AB2FF0-A4D7-4E28-991D-FF26140D5988}"/>
               </a:ext>
             </a:extLst>
           </p:cNvPr>
@@ -5022,7 +5022,7 @@
           <p:cNvPr id="3" name="Espaço Reservado para Texto 2">
             <a:extLst>
               <a:ext uri="{FF2B5EF4-FFF2-40B4-BE49-F238E27FC236}">
-                <a16:creationId xmlns:a16="http://schemas.microsoft.com/office/drawing/2014/main" id="{E2AC45B0-4145-40DB-8E61-105461170604}"/>
+                <a16:creationId xmlns:a16="http://schemas.microsoft.com/office/drawing/2014/main" xmlns="" id="{E2AC45B0-4145-40DB-8E61-105461170604}"/>
               </a:ext>
             </a:extLst>
           </p:cNvPr>
@@ -5147,7 +5147,7 @@
           <p:cNvPr id="4" name="Espaço Reservado para Data 3">
             <a:extLst>
               <a:ext uri="{FF2B5EF4-FFF2-40B4-BE49-F238E27FC236}">
-                <a16:creationId xmlns:a16="http://schemas.microsoft.com/office/drawing/2014/main" id="{50F1D3FB-740A-4EBA-A309-2CE71D12ECFB}"/>
+                <a16:creationId xmlns:a16="http://schemas.microsoft.com/office/drawing/2014/main" xmlns="" id="{50F1D3FB-740A-4EBA-A309-2CE71D12ECFB}"/>
               </a:ext>
             </a:extLst>
           </p:cNvPr>
@@ -5165,7 +5165,7 @@
           <a:p>
             <a:fld id="{63289F7E-B80B-496E-81B4-D396C37C9454}" type="datetimeFigureOut">
               <a:rPr lang="pt-BR" smtClean="0"/>
-              <a:t>25/10/2023</a:t>
+              <a:t>19/04/2025</a:t>
             </a:fld>
             <a:endParaRPr lang="pt-BR"/>
           </a:p>
@@ -5176,7 +5176,7 @@
           <p:cNvPr id="5" name="Espaço Reservado para Rodapé 4">
             <a:extLst>
               <a:ext uri="{FF2B5EF4-FFF2-40B4-BE49-F238E27FC236}">
-                <a16:creationId xmlns:a16="http://schemas.microsoft.com/office/drawing/2014/main" id="{BDCAB18F-8715-4465-A940-F9C193A2ACE9}"/>
+                <a16:creationId xmlns:a16="http://schemas.microsoft.com/office/drawing/2014/main" xmlns="" id="{BDCAB18F-8715-4465-A940-F9C193A2ACE9}"/>
               </a:ext>
             </a:extLst>
           </p:cNvPr>
@@ -5201,7 +5201,7 @@
           <p:cNvPr id="6" name="Espaço Reservado para Número de Slide 5">
             <a:extLst>
               <a:ext uri="{FF2B5EF4-FFF2-40B4-BE49-F238E27FC236}">
-                <a16:creationId xmlns:a16="http://schemas.microsoft.com/office/drawing/2014/main" id="{353466C6-8248-429F-8056-FF040BF509EB}"/>
+                <a16:creationId xmlns:a16="http://schemas.microsoft.com/office/drawing/2014/main" xmlns="" id="{353466C6-8248-429F-8056-FF040BF509EB}"/>
               </a:ext>
             </a:extLst>
           </p:cNvPr>
@@ -5260,7 +5260,7 @@
           <p:cNvPr id="2" name="Título 1">
             <a:extLst>
               <a:ext uri="{FF2B5EF4-FFF2-40B4-BE49-F238E27FC236}">
-                <a16:creationId xmlns:a16="http://schemas.microsoft.com/office/drawing/2014/main" id="{BC7BB9F0-F14B-4A91-B2B7-35BC47FE4DE7}"/>
+                <a16:creationId xmlns:a16="http://schemas.microsoft.com/office/drawing/2014/main" xmlns="" id="{BC7BB9F0-F14B-4A91-B2B7-35BC47FE4DE7}"/>
               </a:ext>
             </a:extLst>
           </p:cNvPr>
@@ -5288,7 +5288,7 @@
           <p:cNvPr id="3" name="Espaço Reservado para Conteúdo 2">
             <a:extLst>
               <a:ext uri="{FF2B5EF4-FFF2-40B4-BE49-F238E27FC236}">
-                <a16:creationId xmlns:a16="http://schemas.microsoft.com/office/drawing/2014/main" id="{EC1FC1C4-73DA-47A6-8496-B0B457F7D39A}"/>
+                <a16:creationId xmlns:a16="http://schemas.microsoft.com/office/drawing/2014/main" xmlns="" id="{EC1FC1C4-73DA-47A6-8496-B0B457F7D39A}"/>
               </a:ext>
             </a:extLst>
           </p:cNvPr>
@@ -5350,7 +5350,7 @@
           <p:cNvPr id="4" name="Espaço Reservado para Conteúdo 3">
             <a:extLst>
               <a:ext uri="{FF2B5EF4-FFF2-40B4-BE49-F238E27FC236}">
-                <a16:creationId xmlns:a16="http://schemas.microsoft.com/office/drawing/2014/main" id="{E92F06A8-A449-4D92-9912-76873E529B38}"/>
+                <a16:creationId xmlns:a16="http://schemas.microsoft.com/office/drawing/2014/main" xmlns="" id="{E92F06A8-A449-4D92-9912-76873E529B38}"/>
               </a:ext>
             </a:extLst>
           </p:cNvPr>
@@ -5412,7 +5412,7 @@
           <p:cNvPr id="5" name="Espaço Reservado para Data 4">
             <a:extLst>
               <a:ext uri="{FF2B5EF4-FFF2-40B4-BE49-F238E27FC236}">
-                <a16:creationId xmlns:a16="http://schemas.microsoft.com/office/drawing/2014/main" id="{938070A4-BC2F-4D55-BD8D-DEAF11BB9EE9}"/>
+                <a16:creationId xmlns:a16="http://schemas.microsoft.com/office/drawing/2014/main" xmlns="" id="{938070A4-BC2F-4D55-BD8D-DEAF11BB9EE9}"/>
               </a:ext>
             </a:extLst>
           </p:cNvPr>
@@ -5430,7 +5430,7 @@
           <a:p>
             <a:fld id="{63289F7E-B80B-496E-81B4-D396C37C9454}" type="datetimeFigureOut">
               <a:rPr lang="pt-BR" smtClean="0"/>
-              <a:t>25/10/2023</a:t>
+              <a:t>19/04/2025</a:t>
             </a:fld>
             <a:endParaRPr lang="pt-BR"/>
           </a:p>
@@ -5441,7 +5441,7 @@
           <p:cNvPr id="6" name="Espaço Reservado para Rodapé 5">
             <a:extLst>
               <a:ext uri="{FF2B5EF4-FFF2-40B4-BE49-F238E27FC236}">
-                <a16:creationId xmlns:a16="http://schemas.microsoft.com/office/drawing/2014/main" id="{45CC2DB8-844A-465F-BA9A-7734C80C7F43}"/>
+                <a16:creationId xmlns:a16="http://schemas.microsoft.com/office/drawing/2014/main" xmlns="" id="{45CC2DB8-844A-465F-BA9A-7734C80C7F43}"/>
               </a:ext>
             </a:extLst>
           </p:cNvPr>
@@ -5466,7 +5466,7 @@
           <p:cNvPr id="7" name="Espaço Reservado para Número de Slide 6">
             <a:extLst>
               <a:ext uri="{FF2B5EF4-FFF2-40B4-BE49-F238E27FC236}">
-                <a16:creationId xmlns:a16="http://schemas.microsoft.com/office/drawing/2014/main" id="{4CC606A8-097B-4040-94E0-CD8C88280D8F}"/>
+                <a16:creationId xmlns:a16="http://schemas.microsoft.com/office/drawing/2014/main" xmlns="" id="{4CC606A8-097B-4040-94E0-CD8C88280D8F}"/>
               </a:ext>
             </a:extLst>
           </p:cNvPr>
@@ -5525,7 +5525,7 @@
           <p:cNvPr id="2" name="Título 1">
             <a:extLst>
               <a:ext uri="{FF2B5EF4-FFF2-40B4-BE49-F238E27FC236}">
-                <a16:creationId xmlns:a16="http://schemas.microsoft.com/office/drawing/2014/main" id="{76D66686-0143-4CB6-8C09-BA326F1E7ACA}"/>
+                <a16:creationId xmlns:a16="http://schemas.microsoft.com/office/drawing/2014/main" xmlns="" id="{76D66686-0143-4CB6-8C09-BA326F1E7ACA}"/>
               </a:ext>
             </a:extLst>
           </p:cNvPr>
@@ -5558,7 +5558,7 @@
           <p:cNvPr id="3" name="Espaço Reservado para Texto 2">
             <a:extLst>
               <a:ext uri="{FF2B5EF4-FFF2-40B4-BE49-F238E27FC236}">
-                <a16:creationId xmlns:a16="http://schemas.microsoft.com/office/drawing/2014/main" id="{0227AB85-F59E-4BCE-B846-4FA0992C2F23}"/>
+                <a16:creationId xmlns:a16="http://schemas.microsoft.com/office/drawing/2014/main" xmlns="" id="{0227AB85-F59E-4BCE-B846-4FA0992C2F23}"/>
               </a:ext>
             </a:extLst>
           </p:cNvPr>
@@ -5629,7 +5629,7 @@
           <p:cNvPr id="4" name="Espaço Reservado para Conteúdo 3">
             <a:extLst>
               <a:ext uri="{FF2B5EF4-FFF2-40B4-BE49-F238E27FC236}">
-                <a16:creationId xmlns:a16="http://schemas.microsoft.com/office/drawing/2014/main" id="{3373456C-7319-4D0A-827D-D29F6B083F5D}"/>
+                <a16:creationId xmlns:a16="http://schemas.microsoft.com/office/drawing/2014/main" xmlns="" id="{3373456C-7319-4D0A-827D-D29F6B083F5D}"/>
               </a:ext>
             </a:extLst>
           </p:cNvPr>
@@ -5691,7 +5691,7 @@
           <p:cNvPr id="5" name="Espaço Reservado para Texto 4">
             <a:extLst>
               <a:ext uri="{FF2B5EF4-FFF2-40B4-BE49-F238E27FC236}">
-                <a16:creationId xmlns:a16="http://schemas.microsoft.com/office/drawing/2014/main" id="{4CD109D0-2E83-4262-8029-A871CEC47406}"/>
+                <a16:creationId xmlns:a16="http://schemas.microsoft.com/office/drawing/2014/main" xmlns="" id="{4CD109D0-2E83-4262-8029-A871CEC47406}"/>
               </a:ext>
             </a:extLst>
           </p:cNvPr>
@@ -5762,7 +5762,7 @@
           <p:cNvPr id="6" name="Espaço Reservado para Conteúdo 5">
             <a:extLst>
               <a:ext uri="{FF2B5EF4-FFF2-40B4-BE49-F238E27FC236}">
-                <a16:creationId xmlns:a16="http://schemas.microsoft.com/office/drawing/2014/main" id="{AD706E3A-CFBB-4A6C-A65F-D0360A9E74FE}"/>
+                <a16:creationId xmlns:a16="http://schemas.microsoft.com/office/drawing/2014/main" xmlns="" id="{AD706E3A-CFBB-4A6C-A65F-D0360A9E74FE}"/>
               </a:ext>
             </a:extLst>
           </p:cNvPr>
@@ -5824,7 +5824,7 @@
           <p:cNvPr id="7" name="Espaço Reservado para Data 6">
             <a:extLst>
               <a:ext uri="{FF2B5EF4-FFF2-40B4-BE49-F238E27FC236}">
-                <a16:creationId xmlns:a16="http://schemas.microsoft.com/office/drawing/2014/main" id="{4172C0E5-5AF0-4805-BB51-443733CD2BD5}"/>
+                <a16:creationId xmlns:a16="http://schemas.microsoft.com/office/drawing/2014/main" xmlns="" id="{4172C0E5-5AF0-4805-BB51-443733CD2BD5}"/>
               </a:ext>
             </a:extLst>
           </p:cNvPr>
@@ -5842,7 +5842,7 @@
           <a:p>
             <a:fld id="{63289F7E-B80B-496E-81B4-D396C37C9454}" type="datetimeFigureOut">
               <a:rPr lang="pt-BR" smtClean="0"/>
-              <a:t>25/10/2023</a:t>
+              <a:t>19/04/2025</a:t>
             </a:fld>
             <a:endParaRPr lang="pt-BR"/>
           </a:p>
@@ -5853,7 +5853,7 @@
           <p:cNvPr id="8" name="Espaço Reservado para Rodapé 7">
             <a:extLst>
               <a:ext uri="{FF2B5EF4-FFF2-40B4-BE49-F238E27FC236}">
-                <a16:creationId xmlns:a16="http://schemas.microsoft.com/office/drawing/2014/main" id="{0E801648-156F-497E-99CF-797DF48051E1}"/>
+                <a16:creationId xmlns:a16="http://schemas.microsoft.com/office/drawing/2014/main" xmlns="" id="{0E801648-156F-497E-99CF-797DF48051E1}"/>
               </a:ext>
             </a:extLst>
           </p:cNvPr>
@@ -5878,7 +5878,7 @@
           <p:cNvPr id="9" name="Espaço Reservado para Número de Slide 8">
             <a:extLst>
               <a:ext uri="{FF2B5EF4-FFF2-40B4-BE49-F238E27FC236}">
-                <a16:creationId xmlns:a16="http://schemas.microsoft.com/office/drawing/2014/main" id="{EEE23D32-80E7-4796-A137-66BF842E4B53}"/>
+                <a16:creationId xmlns:a16="http://schemas.microsoft.com/office/drawing/2014/main" xmlns="" id="{EEE23D32-80E7-4796-A137-66BF842E4B53}"/>
               </a:ext>
             </a:extLst>
           </p:cNvPr>
@@ -5937,7 +5937,7 @@
           <p:cNvPr id="2" name="Título 1">
             <a:extLst>
               <a:ext uri="{FF2B5EF4-FFF2-40B4-BE49-F238E27FC236}">
-                <a16:creationId xmlns:a16="http://schemas.microsoft.com/office/drawing/2014/main" id="{2BCE2379-C78F-47E1-8CFC-B846E7AF148D}"/>
+                <a16:creationId xmlns:a16="http://schemas.microsoft.com/office/drawing/2014/main" xmlns="" id="{2BCE2379-C78F-47E1-8CFC-B846E7AF148D}"/>
               </a:ext>
             </a:extLst>
           </p:cNvPr>
@@ -5965,7 +5965,7 @@
           <p:cNvPr id="3" name="Espaço Reservado para Data 2">
             <a:extLst>
               <a:ext uri="{FF2B5EF4-FFF2-40B4-BE49-F238E27FC236}">
-                <a16:creationId xmlns:a16="http://schemas.microsoft.com/office/drawing/2014/main" id="{342600A9-7F92-4E22-9D94-E4717252A817}"/>
+                <a16:creationId xmlns:a16="http://schemas.microsoft.com/office/drawing/2014/main" xmlns="" id="{342600A9-7F92-4E22-9D94-E4717252A817}"/>
               </a:ext>
             </a:extLst>
           </p:cNvPr>
@@ -5983,7 +5983,7 @@
           <a:p>
             <a:fld id="{63289F7E-B80B-496E-81B4-D396C37C9454}" type="datetimeFigureOut">
               <a:rPr lang="pt-BR" smtClean="0"/>
-              <a:t>25/10/2023</a:t>
+              <a:t>19/04/2025</a:t>
             </a:fld>
             <a:endParaRPr lang="pt-BR"/>
           </a:p>
@@ -5994,7 +5994,7 @@
           <p:cNvPr id="4" name="Espaço Reservado para Rodapé 3">
             <a:extLst>
               <a:ext uri="{FF2B5EF4-FFF2-40B4-BE49-F238E27FC236}">
-                <a16:creationId xmlns:a16="http://schemas.microsoft.com/office/drawing/2014/main" id="{192E6BED-F546-40CC-A2DF-99CBA853654E}"/>
+                <a16:creationId xmlns:a16="http://schemas.microsoft.com/office/drawing/2014/main" xmlns="" id="{192E6BED-F546-40CC-A2DF-99CBA853654E}"/>
               </a:ext>
             </a:extLst>
           </p:cNvPr>
@@ -6019,7 +6019,7 @@
           <p:cNvPr id="5" name="Espaço Reservado para Número de Slide 4">
             <a:extLst>
               <a:ext uri="{FF2B5EF4-FFF2-40B4-BE49-F238E27FC236}">
-                <a16:creationId xmlns:a16="http://schemas.microsoft.com/office/drawing/2014/main" id="{6091CC40-A8C4-4063-80EB-CC5099621678}"/>
+                <a16:creationId xmlns:a16="http://schemas.microsoft.com/office/drawing/2014/main" xmlns="" id="{6091CC40-A8C4-4063-80EB-CC5099621678}"/>
               </a:ext>
             </a:extLst>
           </p:cNvPr>
@@ -6078,7 +6078,7 @@
           <p:cNvPr id="2" name="Espaço Reservado para Data 1">
             <a:extLst>
               <a:ext uri="{FF2B5EF4-FFF2-40B4-BE49-F238E27FC236}">
-                <a16:creationId xmlns:a16="http://schemas.microsoft.com/office/drawing/2014/main" id="{DD19515C-212C-4EAE-84A3-8FF4BC844F1B}"/>
+                <a16:creationId xmlns:a16="http://schemas.microsoft.com/office/drawing/2014/main" xmlns="" id="{DD19515C-212C-4EAE-84A3-8FF4BC844F1B}"/>
               </a:ext>
             </a:extLst>
           </p:cNvPr>
@@ -6096,7 +6096,7 @@
           <a:p>
             <a:fld id="{63289F7E-B80B-496E-81B4-D396C37C9454}" type="datetimeFigureOut">
               <a:rPr lang="pt-BR" smtClean="0"/>
-              <a:t>25/10/2023</a:t>
+              <a:t>19/04/2025</a:t>
             </a:fld>
             <a:endParaRPr lang="pt-BR"/>
           </a:p>
@@ -6107,7 +6107,7 @@
           <p:cNvPr id="3" name="Espaço Reservado para Rodapé 2">
             <a:extLst>
               <a:ext uri="{FF2B5EF4-FFF2-40B4-BE49-F238E27FC236}">
-                <a16:creationId xmlns:a16="http://schemas.microsoft.com/office/drawing/2014/main" id="{94D3D120-B3E8-4C96-861D-7A4F12F49B3A}"/>
+                <a16:creationId xmlns:a16="http://schemas.microsoft.com/office/drawing/2014/main" xmlns="" id="{94D3D120-B3E8-4C96-861D-7A4F12F49B3A}"/>
               </a:ext>
             </a:extLst>
           </p:cNvPr>
@@ -6132,7 +6132,7 @@
           <p:cNvPr id="4" name="Espaço Reservado para Número de Slide 3">
             <a:extLst>
               <a:ext uri="{FF2B5EF4-FFF2-40B4-BE49-F238E27FC236}">
-                <a16:creationId xmlns:a16="http://schemas.microsoft.com/office/drawing/2014/main" id="{42E49B68-FA1B-468B-9F17-D5C09243D454}"/>
+                <a16:creationId xmlns:a16="http://schemas.microsoft.com/office/drawing/2014/main" xmlns="" id="{42E49B68-FA1B-468B-9F17-D5C09243D454}"/>
               </a:ext>
             </a:extLst>
           </p:cNvPr>
@@ -6191,7 +6191,7 @@
           <p:cNvPr id="2" name="Título 1">
             <a:extLst>
               <a:ext uri="{FF2B5EF4-FFF2-40B4-BE49-F238E27FC236}">
-                <a16:creationId xmlns:a16="http://schemas.microsoft.com/office/drawing/2014/main" id="{1C17BCBE-A897-4319-85EC-D87909C24980}"/>
+                <a16:creationId xmlns:a16="http://schemas.microsoft.com/office/drawing/2014/main" xmlns="" id="{1C17BCBE-A897-4319-85EC-D87909C24980}"/>
               </a:ext>
             </a:extLst>
           </p:cNvPr>
@@ -6228,7 +6228,7 @@
           <p:cNvPr id="3" name="Espaço Reservado para Conteúdo 2">
             <a:extLst>
               <a:ext uri="{FF2B5EF4-FFF2-40B4-BE49-F238E27FC236}">
-                <a16:creationId xmlns:a16="http://schemas.microsoft.com/office/drawing/2014/main" id="{4226F885-0204-4913-868B-4B8B82576F17}"/>
+                <a16:creationId xmlns:a16="http://schemas.microsoft.com/office/drawing/2014/main" xmlns="" id="{4226F885-0204-4913-868B-4B8B82576F17}"/>
               </a:ext>
             </a:extLst>
           </p:cNvPr>
@@ -6318,7 +6318,7 @@
           <p:cNvPr id="4" name="Espaço Reservado para Texto 3">
             <a:extLst>
               <a:ext uri="{FF2B5EF4-FFF2-40B4-BE49-F238E27FC236}">
-                <a16:creationId xmlns:a16="http://schemas.microsoft.com/office/drawing/2014/main" id="{00F9F784-A858-441B-8AB5-697098141751}"/>
+                <a16:creationId xmlns:a16="http://schemas.microsoft.com/office/drawing/2014/main" xmlns="" id="{00F9F784-A858-441B-8AB5-697098141751}"/>
               </a:ext>
             </a:extLst>
           </p:cNvPr>
@@ -6389,7 +6389,7 @@
           <p:cNvPr id="5" name="Espaço Reservado para Data 4">
             <a:extLst>
               <a:ext uri="{FF2B5EF4-FFF2-40B4-BE49-F238E27FC236}">
-                <a16:creationId xmlns:a16="http://schemas.microsoft.com/office/drawing/2014/main" id="{A4DC363A-5000-472E-8B17-02E7DCB8840A}"/>
+                <a16:creationId xmlns:a16="http://schemas.microsoft.com/office/drawing/2014/main" xmlns="" id="{A4DC363A-5000-472E-8B17-02E7DCB8840A}"/>
               </a:ext>
             </a:extLst>
           </p:cNvPr>
@@ -6407,7 +6407,7 @@
           <a:p>
             <a:fld id="{63289F7E-B80B-496E-81B4-D396C37C9454}" type="datetimeFigureOut">
               <a:rPr lang="pt-BR" smtClean="0"/>
-              <a:t>25/10/2023</a:t>
+              <a:t>19/04/2025</a:t>
             </a:fld>
             <a:endParaRPr lang="pt-BR"/>
           </a:p>
@@ -6418,7 +6418,7 @@
           <p:cNvPr id="6" name="Espaço Reservado para Rodapé 5">
             <a:extLst>
               <a:ext uri="{FF2B5EF4-FFF2-40B4-BE49-F238E27FC236}">
-                <a16:creationId xmlns:a16="http://schemas.microsoft.com/office/drawing/2014/main" id="{5548425D-2C21-4C56-BAD4-662978775C28}"/>
+                <a16:creationId xmlns:a16="http://schemas.microsoft.com/office/drawing/2014/main" xmlns="" id="{5548425D-2C21-4C56-BAD4-662978775C28}"/>
               </a:ext>
             </a:extLst>
           </p:cNvPr>
@@ -6443,7 +6443,7 @@
           <p:cNvPr id="7" name="Espaço Reservado para Número de Slide 6">
             <a:extLst>
               <a:ext uri="{FF2B5EF4-FFF2-40B4-BE49-F238E27FC236}">
-                <a16:creationId xmlns:a16="http://schemas.microsoft.com/office/drawing/2014/main" id="{C63E9726-E64C-42B2-AE8A-8C235A956B48}"/>
+                <a16:creationId xmlns:a16="http://schemas.microsoft.com/office/drawing/2014/main" xmlns="" id="{C63E9726-E64C-42B2-AE8A-8C235A956B48}"/>
               </a:ext>
             </a:extLst>
           </p:cNvPr>
@@ -6502,7 +6502,7 @@
           <p:cNvPr id="2" name="Título 1">
             <a:extLst>
               <a:ext uri="{FF2B5EF4-FFF2-40B4-BE49-F238E27FC236}">
-                <a16:creationId xmlns:a16="http://schemas.microsoft.com/office/drawing/2014/main" id="{11086A78-3E74-450C-96A6-CA8AC37AF772}"/>
+                <a16:creationId xmlns:a16="http://schemas.microsoft.com/office/drawing/2014/main" xmlns="" id="{11086A78-3E74-450C-96A6-CA8AC37AF772}"/>
               </a:ext>
             </a:extLst>
           </p:cNvPr>
@@ -6539,7 +6539,7 @@
           <p:cNvPr id="3" name="Espaço Reservado para Imagem 2">
             <a:extLst>
               <a:ext uri="{FF2B5EF4-FFF2-40B4-BE49-F238E27FC236}">
-                <a16:creationId xmlns:a16="http://schemas.microsoft.com/office/drawing/2014/main" id="{5F5B7312-975A-4DBC-9B2F-3652ADA006FD}"/>
+                <a16:creationId xmlns:a16="http://schemas.microsoft.com/office/drawing/2014/main" xmlns="" id="{5F5B7312-975A-4DBC-9B2F-3652ADA006FD}"/>
               </a:ext>
             </a:extLst>
           </p:cNvPr>
@@ -6606,7 +6606,7 @@
           <p:cNvPr id="4" name="Espaço Reservado para Texto 3">
             <a:extLst>
               <a:ext uri="{FF2B5EF4-FFF2-40B4-BE49-F238E27FC236}">
-                <a16:creationId xmlns:a16="http://schemas.microsoft.com/office/drawing/2014/main" id="{AAF805F5-1DFF-41C6-944C-7D79FE0D0963}"/>
+                <a16:creationId xmlns:a16="http://schemas.microsoft.com/office/drawing/2014/main" xmlns="" id="{AAF805F5-1DFF-41C6-944C-7D79FE0D0963}"/>
               </a:ext>
             </a:extLst>
           </p:cNvPr>
@@ -6677,7 +6677,7 @@
           <p:cNvPr id="5" name="Espaço Reservado para Data 4">
             <a:extLst>
               <a:ext uri="{FF2B5EF4-FFF2-40B4-BE49-F238E27FC236}">
-                <a16:creationId xmlns:a16="http://schemas.microsoft.com/office/drawing/2014/main" id="{02113D81-8665-4516-BD81-C6A1F254EECD}"/>
+                <a16:creationId xmlns:a16="http://schemas.microsoft.com/office/drawing/2014/main" xmlns="" id="{02113D81-8665-4516-BD81-C6A1F254EECD}"/>
               </a:ext>
             </a:extLst>
           </p:cNvPr>
@@ -6695,7 +6695,7 @@
           <a:p>
             <a:fld id="{63289F7E-B80B-496E-81B4-D396C37C9454}" type="datetimeFigureOut">
               <a:rPr lang="pt-BR" smtClean="0"/>
-              <a:t>25/10/2023</a:t>
+              <a:t>19/04/2025</a:t>
             </a:fld>
             <a:endParaRPr lang="pt-BR"/>
           </a:p>
@@ -6706,7 +6706,7 @@
           <p:cNvPr id="6" name="Espaço Reservado para Rodapé 5">
             <a:extLst>
               <a:ext uri="{FF2B5EF4-FFF2-40B4-BE49-F238E27FC236}">
-                <a16:creationId xmlns:a16="http://schemas.microsoft.com/office/drawing/2014/main" id="{2B00C88B-FF32-40AA-A187-727D96FD7862}"/>
+                <a16:creationId xmlns:a16="http://schemas.microsoft.com/office/drawing/2014/main" xmlns="" id="{2B00C88B-FF32-40AA-A187-727D96FD7862}"/>
               </a:ext>
             </a:extLst>
           </p:cNvPr>
@@ -6731,7 +6731,7 @@
           <p:cNvPr id="7" name="Espaço Reservado para Número de Slide 6">
             <a:extLst>
               <a:ext uri="{FF2B5EF4-FFF2-40B4-BE49-F238E27FC236}">
-                <a16:creationId xmlns:a16="http://schemas.microsoft.com/office/drawing/2014/main" id="{A04D1A2D-69F7-4B8F-A730-BC26DC340BA6}"/>
+                <a16:creationId xmlns:a16="http://schemas.microsoft.com/office/drawing/2014/main" xmlns="" id="{A04D1A2D-69F7-4B8F-A730-BC26DC340BA6}"/>
               </a:ext>
             </a:extLst>
           </p:cNvPr>
@@ -6795,7 +6795,7 @@
           <p:cNvPr id="2" name="Espaço Reservado para Título 1">
             <a:extLst>
               <a:ext uri="{FF2B5EF4-FFF2-40B4-BE49-F238E27FC236}">
-                <a16:creationId xmlns:a16="http://schemas.microsoft.com/office/drawing/2014/main" id="{E69A0273-1966-4A1B-9370-4C1CE5036371}"/>
+                <a16:creationId xmlns:a16="http://schemas.microsoft.com/office/drawing/2014/main" xmlns="" id="{E69A0273-1966-4A1B-9370-4C1CE5036371}"/>
               </a:ext>
             </a:extLst>
           </p:cNvPr>
@@ -6833,7 +6833,7 @@
           <p:cNvPr id="3" name="Espaço Reservado para Texto 2">
             <a:extLst>
               <a:ext uri="{FF2B5EF4-FFF2-40B4-BE49-F238E27FC236}">
-                <a16:creationId xmlns:a16="http://schemas.microsoft.com/office/drawing/2014/main" id="{3B9CF87A-0448-49A7-AB25-EBC1D56A40EF}"/>
+                <a16:creationId xmlns:a16="http://schemas.microsoft.com/office/drawing/2014/main" xmlns="" id="{3B9CF87A-0448-49A7-AB25-EBC1D56A40EF}"/>
               </a:ext>
             </a:extLst>
           </p:cNvPr>
@@ -6900,7 +6900,7 @@
           <p:cNvPr id="4" name="Espaço Reservado para Data 3">
             <a:extLst>
               <a:ext uri="{FF2B5EF4-FFF2-40B4-BE49-F238E27FC236}">
-                <a16:creationId xmlns:a16="http://schemas.microsoft.com/office/drawing/2014/main" id="{2EF7B1F2-BB5A-44D0-816D-16AD2C71430E}"/>
+                <a16:creationId xmlns:a16="http://schemas.microsoft.com/office/drawing/2014/main" xmlns="" id="{2EF7B1F2-BB5A-44D0-816D-16AD2C71430E}"/>
               </a:ext>
             </a:extLst>
           </p:cNvPr>
@@ -6936,7 +6936,7 @@
           <a:p>
             <a:fld id="{63289F7E-B80B-496E-81B4-D396C37C9454}" type="datetimeFigureOut">
               <a:rPr lang="pt-BR" smtClean="0"/>
-              <a:t>25/10/2023</a:t>
+              <a:t>19/04/2025</a:t>
             </a:fld>
             <a:endParaRPr lang="pt-BR"/>
           </a:p>
@@ -6947,7 +6947,7 @@
           <p:cNvPr id="5" name="Espaço Reservado para Rodapé 4">
             <a:extLst>
               <a:ext uri="{FF2B5EF4-FFF2-40B4-BE49-F238E27FC236}">
-                <a16:creationId xmlns:a16="http://schemas.microsoft.com/office/drawing/2014/main" id="{C703F94C-2CC8-4DAA-BC35-14FC3E841DCD}"/>
+                <a16:creationId xmlns:a16="http://schemas.microsoft.com/office/drawing/2014/main" xmlns="" id="{C703F94C-2CC8-4DAA-BC35-14FC3E841DCD}"/>
               </a:ext>
             </a:extLst>
           </p:cNvPr>
@@ -6990,7 +6990,7 @@
           <p:cNvPr id="6" name="Espaço Reservado para Número de Slide 5">
             <a:extLst>
               <a:ext uri="{FF2B5EF4-FFF2-40B4-BE49-F238E27FC236}">
-                <a16:creationId xmlns:a16="http://schemas.microsoft.com/office/drawing/2014/main" id="{64051336-7048-457A-8B61-D94291D71648}"/>
+                <a16:creationId xmlns:a16="http://schemas.microsoft.com/office/drawing/2014/main" xmlns="" id="{64051336-7048-457A-8B61-D94291D71648}"/>
               </a:ext>
             </a:extLst>
           </p:cNvPr>
@@ -7489,7 +7489,7 @@
             <a:fld id="{1D8BD707-D9CF-40AE-B4C6-C98DA3205C09}" type="datetimeFigureOut">
               <a:rPr lang="en-US" smtClean="0"/>
               <a:pPr/>
-              <a:t>10/25/2023</a:t>
+              <a:t>4/19/2025</a:t>
             </a:fld>
             <a:endParaRPr lang="en-US"/>
           </a:p>
@@ -7870,7 +7870,7 @@
           <p:cNvPr id="2" name="Título 1">
             <a:extLst>
               <a:ext uri="{FF2B5EF4-FFF2-40B4-BE49-F238E27FC236}">
-                <a16:creationId xmlns:a16="http://schemas.microsoft.com/office/drawing/2014/main" id="{32666AC8-2E17-4DB4-B0F5-60C640CCFD2E}"/>
+                <a16:creationId xmlns:a16="http://schemas.microsoft.com/office/drawing/2014/main" xmlns="" id="{32666AC8-2E17-4DB4-B0F5-60C640CCFD2E}"/>
               </a:ext>
             </a:extLst>
           </p:cNvPr>
@@ -7905,6 +7905,10 @@
               <a:rPr lang="pt-BR" sz="5400" dirty="0"/>
               <a:t> Learning:</a:t>
             </a:r>
+            <a:r>
+              <a:rPr lang="pt-BR" dirty="0"/>
+              <a:t/>
+            </a:r>
             <a:br>
               <a:rPr lang="pt-BR" dirty="0"/>
             </a:br>
@@ -7913,12 +7917,16 @@
               <a:t>Arduino nano </a:t>
             </a:r>
             <a:r>
-              <a:rPr lang="pt-BR" b="1" i="1" dirty="0" err="1"/>
-              <a:t>ble</a:t>
+              <a:rPr lang="pt-BR" b="1" i="1" dirty="0" smtClean="0"/>
+              <a:t>BLE</a:t>
+            </a:r>
+            <a:r>
+              <a:rPr lang="pt-BR" b="1" i="1" dirty="0" smtClean="0"/>
+              <a:t> </a:t>
             </a:r>
             <a:r>
               <a:rPr lang="pt-BR" b="1" i="1" dirty="0"/>
-              <a:t> 33 </a:t>
+              <a:t>33 </a:t>
             </a:r>
             <a:r>
               <a:rPr lang="pt-BR" b="1" i="1" dirty="0" err="1"/>
@@ -7933,7 +7941,7 @@
           <p:cNvPr id="1026" name="Picture 2" descr="Logo">
             <a:extLst>
               <a:ext uri="{FF2B5EF4-FFF2-40B4-BE49-F238E27FC236}">
-                <a16:creationId xmlns:a16="http://schemas.microsoft.com/office/drawing/2014/main" id="{3F2642E0-4F6A-4196-8F58-E77D36E9A33F}"/>
+                <a16:creationId xmlns:a16="http://schemas.microsoft.com/office/drawing/2014/main" xmlns="" id="{3F2642E0-4F6A-4196-8F58-E77D36E9A33F}"/>
               </a:ext>
             </a:extLst>
           </p:cNvPr>
@@ -7978,7 +7986,7 @@
           <p:cNvPr id="5122" name="Picture 2" descr="Image result for machine learning">
             <a:extLst>
               <a:ext uri="{FF2B5EF4-FFF2-40B4-BE49-F238E27FC236}">
-                <a16:creationId xmlns:a16="http://schemas.microsoft.com/office/drawing/2014/main" id="{810CE0A2-4102-44A6-A370-175E7896CDCB}"/>
+                <a16:creationId xmlns:a16="http://schemas.microsoft.com/office/drawing/2014/main" xmlns="" id="{810CE0A2-4102-44A6-A370-175E7896CDCB}"/>
               </a:ext>
             </a:extLst>
           </p:cNvPr>
@@ -8023,7 +8031,7 @@
           <p:cNvPr id="3" name="Picture 2" descr="IoT Group">
             <a:extLst>
               <a:ext uri="{FF2B5EF4-FFF2-40B4-BE49-F238E27FC236}">
-                <a16:creationId xmlns:a16="http://schemas.microsoft.com/office/drawing/2014/main" id="{AC034F57-E830-B6E7-6790-12FDBBDB2975}"/>
+                <a16:creationId xmlns:a16="http://schemas.microsoft.com/office/drawing/2014/main" xmlns="" id="{AC034F57-E830-B6E7-6790-12FDBBDB2975}"/>
               </a:ext>
             </a:extLst>
           </p:cNvPr>
@@ -8068,7 +8076,7 @@
           <p:cNvPr id="5" name="CaixaDeTexto 4">
             <a:extLst>
               <a:ext uri="{FF2B5EF4-FFF2-40B4-BE49-F238E27FC236}">
-                <a16:creationId xmlns:a16="http://schemas.microsoft.com/office/drawing/2014/main" id="{2D82026D-D2EA-05D7-61F2-DEE04704DB7E}"/>
+                <a16:creationId xmlns:a16="http://schemas.microsoft.com/office/drawing/2014/main" xmlns="" id="{2D82026D-D2EA-05D7-61F2-DEE04704DB7E}"/>
               </a:ext>
             </a:extLst>
           </p:cNvPr>
@@ -8109,7 +8117,7 @@
           <p:cNvPr id="7" name="CaixaDeTexto 6">
             <a:extLst>
               <a:ext uri="{FF2B5EF4-FFF2-40B4-BE49-F238E27FC236}">
-                <a16:creationId xmlns:a16="http://schemas.microsoft.com/office/drawing/2014/main" id="{BAE3CB96-F009-DF5F-F24C-345E978F9844}"/>
+                <a16:creationId xmlns:a16="http://schemas.microsoft.com/office/drawing/2014/main" xmlns="" id="{BAE3CB96-F009-DF5F-F24C-345E978F9844}"/>
               </a:ext>
             </a:extLst>
           </p:cNvPr>
@@ -8188,7 +8196,7 @@
           <p:cNvPr id="2" name="Título 1">
             <a:extLst>
               <a:ext uri="{FF2B5EF4-FFF2-40B4-BE49-F238E27FC236}">
-                <a16:creationId xmlns:a16="http://schemas.microsoft.com/office/drawing/2014/main" id="{5F09B89C-3183-4D52-981A-62798DDFF2B8}"/>
+                <a16:creationId xmlns:a16="http://schemas.microsoft.com/office/drawing/2014/main" xmlns="" id="{5F09B89C-3183-4D52-981A-62798DDFF2B8}"/>
               </a:ext>
             </a:extLst>
           </p:cNvPr>
@@ -8216,12 +8224,8 @@
               <a:t>Arduino nano </a:t>
             </a:r>
             <a:r>
-              <a:rPr lang="pt-BR" b="1" i="1" dirty="0" err="1"/>
-              <a:t>ble</a:t>
-            </a:r>
-            <a:r>
               <a:rPr lang="pt-BR" b="1" i="1" dirty="0"/>
-              <a:t> 33 </a:t>
+              <a:t>BLE 33 </a:t>
             </a:r>
             <a:r>
               <a:rPr lang="pt-BR" b="1" i="1" dirty="0" err="1"/>
@@ -8236,7 +8240,7 @@
           <p:cNvPr id="4" name="Espaço Reservado para Conteúdo 3">
             <a:extLst>
               <a:ext uri="{FF2B5EF4-FFF2-40B4-BE49-F238E27FC236}">
-                <a16:creationId xmlns:a16="http://schemas.microsoft.com/office/drawing/2014/main" id="{9F2596B6-9FD2-2F7D-80F1-B2F04E2D8D08}"/>
+                <a16:creationId xmlns:a16="http://schemas.microsoft.com/office/drawing/2014/main" xmlns="" id="{9F2596B6-9FD2-2F7D-80F1-B2F04E2D8D08}"/>
               </a:ext>
             </a:extLst>
           </p:cNvPr>
@@ -8273,7 +8277,7 @@
           <p:cNvPr id="5" name="Imagem 4">
             <a:extLst>
               <a:ext uri="{FF2B5EF4-FFF2-40B4-BE49-F238E27FC236}">
-                <a16:creationId xmlns:a16="http://schemas.microsoft.com/office/drawing/2014/main" id="{39DAC04D-AD4B-DCFA-1539-649B505DB69B}"/>
+                <a16:creationId xmlns:a16="http://schemas.microsoft.com/office/drawing/2014/main" xmlns="" id="{39DAC04D-AD4B-DCFA-1539-649B505DB69B}"/>
               </a:ext>
             </a:extLst>
           </p:cNvPr>
@@ -8303,7 +8307,7 @@
           <p:cNvPr id="8" name="Imagem 7">
             <a:extLst>
               <a:ext uri="{FF2B5EF4-FFF2-40B4-BE49-F238E27FC236}">
-                <a16:creationId xmlns:a16="http://schemas.microsoft.com/office/drawing/2014/main" id="{D7144D36-9773-153E-19B2-CFCE97F30819}"/>
+                <a16:creationId xmlns:a16="http://schemas.microsoft.com/office/drawing/2014/main" xmlns="" id="{D7144D36-9773-153E-19B2-CFCE97F30819}"/>
               </a:ext>
             </a:extLst>
           </p:cNvPr>
@@ -8377,7 +8381,7 @@
           <p:cNvPr id="2" name="Título 1">
             <a:extLst>
               <a:ext uri="{FF2B5EF4-FFF2-40B4-BE49-F238E27FC236}">
-                <a16:creationId xmlns:a16="http://schemas.microsoft.com/office/drawing/2014/main" id="{5F09B89C-3183-4D52-981A-62798DDFF2B8}"/>
+                <a16:creationId xmlns:a16="http://schemas.microsoft.com/office/drawing/2014/main" xmlns="" id="{5F09B89C-3183-4D52-981A-62798DDFF2B8}"/>
               </a:ext>
             </a:extLst>
           </p:cNvPr>
@@ -8405,12 +8409,8 @@
               <a:t>Arduino nano </a:t>
             </a:r>
             <a:r>
-              <a:rPr lang="pt-BR" b="1" i="1" dirty="0" err="1"/>
-              <a:t>ble</a:t>
-            </a:r>
-            <a:r>
               <a:rPr lang="pt-BR" b="1" i="1" dirty="0"/>
-              <a:t> 33 </a:t>
+              <a:t>BLE 33 </a:t>
             </a:r>
             <a:r>
               <a:rPr lang="pt-BR" b="1" i="1" dirty="0" err="1"/>
@@ -8425,7 +8425,7 @@
           <p:cNvPr id="4" name="Espaço Reservado para Conteúdo 3">
             <a:extLst>
               <a:ext uri="{FF2B5EF4-FFF2-40B4-BE49-F238E27FC236}">
-                <a16:creationId xmlns:a16="http://schemas.microsoft.com/office/drawing/2014/main" id="{9F2596B6-9FD2-2F7D-80F1-B2F04E2D8D08}"/>
+                <a16:creationId xmlns:a16="http://schemas.microsoft.com/office/drawing/2014/main" xmlns="" id="{9F2596B6-9FD2-2F7D-80F1-B2F04E2D8D08}"/>
               </a:ext>
             </a:extLst>
           </p:cNvPr>
@@ -8462,7 +8462,7 @@
           <p:cNvPr id="5" name="Imagem 4">
             <a:extLst>
               <a:ext uri="{FF2B5EF4-FFF2-40B4-BE49-F238E27FC236}">
-                <a16:creationId xmlns:a16="http://schemas.microsoft.com/office/drawing/2014/main" id="{93151E90-7729-BF56-0082-845839B8DB95}"/>
+                <a16:creationId xmlns:a16="http://schemas.microsoft.com/office/drawing/2014/main" xmlns="" id="{93151E90-7729-BF56-0082-845839B8DB95}"/>
               </a:ext>
             </a:extLst>
           </p:cNvPr>
@@ -8492,7 +8492,7 @@
           <p:cNvPr id="8" name="Imagem 7">
             <a:extLst>
               <a:ext uri="{FF2B5EF4-FFF2-40B4-BE49-F238E27FC236}">
-                <a16:creationId xmlns:a16="http://schemas.microsoft.com/office/drawing/2014/main" id="{61193B20-F49E-EFE8-58CE-C25AD9EE3C79}"/>
+                <a16:creationId xmlns:a16="http://schemas.microsoft.com/office/drawing/2014/main" xmlns="" id="{61193B20-F49E-EFE8-58CE-C25AD9EE3C79}"/>
               </a:ext>
             </a:extLst>
           </p:cNvPr>
@@ -8566,7 +8566,7 @@
           <p:cNvPr id="2" name="Título 1">
             <a:extLst>
               <a:ext uri="{FF2B5EF4-FFF2-40B4-BE49-F238E27FC236}">
-                <a16:creationId xmlns:a16="http://schemas.microsoft.com/office/drawing/2014/main" id="{5F09B89C-3183-4D52-981A-62798DDFF2B8}"/>
+                <a16:creationId xmlns:a16="http://schemas.microsoft.com/office/drawing/2014/main" xmlns="" id="{5F09B89C-3183-4D52-981A-62798DDFF2B8}"/>
               </a:ext>
             </a:extLst>
           </p:cNvPr>
@@ -8591,15 +8591,15 @@
           <a:p>
             <a:r>
               <a:rPr lang="pt-BR" b="1" i="1" dirty="0"/>
-              <a:t>Arduino nano </a:t>
-            </a:r>
-            <a:r>
-              <a:rPr lang="pt-BR" b="1" i="1" dirty="0" err="1"/>
-              <a:t>ble</a:t>
-            </a:r>
-            <a:r>
-              <a:rPr lang="pt-BR" b="1" i="1" dirty="0"/>
-              <a:t> 33 </a:t>
+              <a:t>Arduino </a:t>
+            </a:r>
+            <a:r>
+              <a:rPr lang="pt-BR" b="1" i="1"/>
+              <a:t>nano </a:t>
+            </a:r>
+            <a:r>
+              <a:rPr lang="pt-BR" b="1" i="1"/>
+              <a:t>BLE 33 </a:t>
             </a:r>
             <a:r>
               <a:rPr lang="pt-BR" b="1" i="1" dirty="0" err="1"/>
@@ -8614,7 +8614,7 @@
           <p:cNvPr id="4" name="Espaço Reservado para Conteúdo 3">
             <a:extLst>
               <a:ext uri="{FF2B5EF4-FFF2-40B4-BE49-F238E27FC236}">
-                <a16:creationId xmlns:a16="http://schemas.microsoft.com/office/drawing/2014/main" id="{9F2596B6-9FD2-2F7D-80F1-B2F04E2D8D08}"/>
+                <a16:creationId xmlns:a16="http://schemas.microsoft.com/office/drawing/2014/main" xmlns="" id="{9F2596B6-9FD2-2F7D-80F1-B2F04E2D8D08}"/>
               </a:ext>
             </a:extLst>
           </p:cNvPr>
@@ -8651,7 +8651,7 @@
           <p:cNvPr id="1026" name="Picture 2">
             <a:extLst>
               <a:ext uri="{FF2B5EF4-FFF2-40B4-BE49-F238E27FC236}">
-                <a16:creationId xmlns:a16="http://schemas.microsoft.com/office/drawing/2014/main" id="{870ACF80-E49B-7A8E-8308-80262CC43FC2}"/>
+                <a16:creationId xmlns:a16="http://schemas.microsoft.com/office/drawing/2014/main" xmlns="" id="{870ACF80-E49B-7A8E-8308-80262CC43FC2}"/>
               </a:ext>
             </a:extLst>
           </p:cNvPr>
@@ -8698,7 +8698,7 @@
           <p:cNvPr id="7" name="Imagem 6">
             <a:extLst>
               <a:ext uri="{FF2B5EF4-FFF2-40B4-BE49-F238E27FC236}">
-                <a16:creationId xmlns:a16="http://schemas.microsoft.com/office/drawing/2014/main" id="{4CD12151-7755-0B3F-7759-001BEDDC8363}"/>
+                <a16:creationId xmlns:a16="http://schemas.microsoft.com/office/drawing/2014/main" xmlns="" id="{4CD12151-7755-0B3F-7759-001BEDDC8363}"/>
               </a:ext>
             </a:extLst>
           </p:cNvPr>
@@ -8728,7 +8728,7 @@
           <p:cNvPr id="9" name="CaixaDeTexto 8">
             <a:extLst>
               <a:ext uri="{FF2B5EF4-FFF2-40B4-BE49-F238E27FC236}">
-                <a16:creationId xmlns:a16="http://schemas.microsoft.com/office/drawing/2014/main" id="{CBFD94A7-CC7B-222F-1B42-55F614EFED60}"/>
+                <a16:creationId xmlns:a16="http://schemas.microsoft.com/office/drawing/2014/main" xmlns="" id="{CBFD94A7-CC7B-222F-1B42-55F614EFED60}"/>
               </a:ext>
             </a:extLst>
           </p:cNvPr>
@@ -8807,7 +8807,7 @@
           <p:cNvPr id="2" name="Título 1">
             <a:extLst>
               <a:ext uri="{FF2B5EF4-FFF2-40B4-BE49-F238E27FC236}">
-                <a16:creationId xmlns:a16="http://schemas.microsoft.com/office/drawing/2014/main" id="{5F09B89C-3183-4D52-981A-62798DDFF2B8}"/>
+                <a16:creationId xmlns:a16="http://schemas.microsoft.com/office/drawing/2014/main" xmlns="" id="{5F09B89C-3183-4D52-981A-62798DDFF2B8}"/>
               </a:ext>
             </a:extLst>
           </p:cNvPr>
@@ -8835,12 +8835,8 @@
               <a:t>Arduino nano </a:t>
             </a:r>
             <a:r>
-              <a:rPr lang="pt-BR" b="1" i="1" dirty="0" err="1"/>
-              <a:t>ble</a:t>
-            </a:r>
-            <a:r>
-              <a:rPr lang="pt-BR" b="1" i="1" dirty="0"/>
-              <a:t> 33 </a:t>
+              <a:rPr lang="pt-BR" b="1" i="1" dirty="0" smtClean="0"/>
+              <a:t>BLE 33 </a:t>
             </a:r>
             <a:r>
               <a:rPr lang="pt-BR" b="1" i="1" dirty="0" err="1"/>
@@ -8855,7 +8851,7 @@
           <p:cNvPr id="3" name="AutoShape 2" descr="An example of graph signal reconstruction over wireless sensor network. |  Download Scientific Diagram">
             <a:extLst>
               <a:ext uri="{FF2B5EF4-FFF2-40B4-BE49-F238E27FC236}">
-                <a16:creationId xmlns:a16="http://schemas.microsoft.com/office/drawing/2014/main" id="{0166B4DD-D72A-4A54-94A7-2C38133837FD}"/>
+                <a16:creationId xmlns:a16="http://schemas.microsoft.com/office/drawing/2014/main" xmlns="" id="{0166B4DD-D72A-4A54-94A7-2C38133837FD}"/>
               </a:ext>
             </a:extLst>
           </p:cNvPr>
@@ -8906,7 +8902,7 @@
           <p:cNvPr id="7" name="AutoShape 4" descr="An example of graph signal reconstruction over wireless sensor network. |  Download Scientific Diagram">
             <a:extLst>
               <a:ext uri="{FF2B5EF4-FFF2-40B4-BE49-F238E27FC236}">
-                <a16:creationId xmlns:a16="http://schemas.microsoft.com/office/drawing/2014/main" id="{14C2B67D-81A1-457E-A410-FE4350A3CCA4}"/>
+                <a16:creationId xmlns:a16="http://schemas.microsoft.com/office/drawing/2014/main" xmlns="" id="{14C2B67D-81A1-457E-A410-FE4350A3CCA4}"/>
               </a:ext>
             </a:extLst>
           </p:cNvPr>
@@ -8957,7 +8953,7 @@
           <p:cNvPr id="9" name="Espaço Reservado para Conteúdo 8">
             <a:extLst>
               <a:ext uri="{FF2B5EF4-FFF2-40B4-BE49-F238E27FC236}">
-                <a16:creationId xmlns:a16="http://schemas.microsoft.com/office/drawing/2014/main" id="{2F8F08AA-51A0-6F78-8968-E9C73046B422}"/>
+                <a16:creationId xmlns:a16="http://schemas.microsoft.com/office/drawing/2014/main" xmlns="" id="{2F8F08AA-51A0-6F78-8968-E9C73046B422}"/>
               </a:ext>
             </a:extLst>
           </p:cNvPr>
@@ -8986,7 +8982,7 @@
           <p:cNvPr id="12" name="Imagem 11">
             <a:extLst>
               <a:ext uri="{FF2B5EF4-FFF2-40B4-BE49-F238E27FC236}">
-                <a16:creationId xmlns:a16="http://schemas.microsoft.com/office/drawing/2014/main" id="{4F6F60B2-04EE-308E-FA87-B6CD3BCF41C0}"/>
+                <a16:creationId xmlns:a16="http://schemas.microsoft.com/office/drawing/2014/main" xmlns="" id="{4F6F60B2-04EE-308E-FA87-B6CD3BCF41C0}"/>
               </a:ext>
             </a:extLst>
           </p:cNvPr>
@@ -9060,7 +9056,7 @@
           <p:cNvPr id="2" name="Título 1">
             <a:extLst>
               <a:ext uri="{FF2B5EF4-FFF2-40B4-BE49-F238E27FC236}">
-                <a16:creationId xmlns:a16="http://schemas.microsoft.com/office/drawing/2014/main" id="{5F09B89C-3183-4D52-981A-62798DDFF2B8}"/>
+                <a16:creationId xmlns:a16="http://schemas.microsoft.com/office/drawing/2014/main" xmlns="" id="{5F09B89C-3183-4D52-981A-62798DDFF2B8}"/>
               </a:ext>
             </a:extLst>
           </p:cNvPr>
@@ -9088,12 +9084,8 @@
               <a:t>Arduino nano </a:t>
             </a:r>
             <a:r>
-              <a:rPr lang="pt-BR" b="1" i="1" dirty="0" err="1"/>
-              <a:t>ble</a:t>
-            </a:r>
-            <a:r>
               <a:rPr lang="pt-BR" b="1" i="1" dirty="0"/>
-              <a:t> 33 </a:t>
+              <a:t>BLE 33 </a:t>
             </a:r>
             <a:r>
               <a:rPr lang="pt-BR" b="1" i="1" dirty="0" err="1"/>
@@ -9108,7 +9100,7 @@
           <p:cNvPr id="3" name="AutoShape 2" descr="An example of graph signal reconstruction over wireless sensor network. |  Download Scientific Diagram">
             <a:extLst>
               <a:ext uri="{FF2B5EF4-FFF2-40B4-BE49-F238E27FC236}">
-                <a16:creationId xmlns:a16="http://schemas.microsoft.com/office/drawing/2014/main" id="{0166B4DD-D72A-4A54-94A7-2C38133837FD}"/>
+                <a16:creationId xmlns:a16="http://schemas.microsoft.com/office/drawing/2014/main" xmlns="" id="{0166B4DD-D72A-4A54-94A7-2C38133837FD}"/>
               </a:ext>
             </a:extLst>
           </p:cNvPr>
@@ -9159,7 +9151,7 @@
           <p:cNvPr id="7" name="AutoShape 4" descr="An example of graph signal reconstruction over wireless sensor network. |  Download Scientific Diagram">
             <a:extLst>
               <a:ext uri="{FF2B5EF4-FFF2-40B4-BE49-F238E27FC236}">
-                <a16:creationId xmlns:a16="http://schemas.microsoft.com/office/drawing/2014/main" id="{14C2B67D-81A1-457E-A410-FE4350A3CCA4}"/>
+                <a16:creationId xmlns:a16="http://schemas.microsoft.com/office/drawing/2014/main" xmlns="" id="{14C2B67D-81A1-457E-A410-FE4350A3CCA4}"/>
               </a:ext>
             </a:extLst>
           </p:cNvPr>
@@ -9210,7 +9202,7 @@
           <p:cNvPr id="8" name="Espaço Reservado para Conteúdo 7">
             <a:extLst>
               <a:ext uri="{FF2B5EF4-FFF2-40B4-BE49-F238E27FC236}">
-                <a16:creationId xmlns:a16="http://schemas.microsoft.com/office/drawing/2014/main" id="{74DDEDF1-6CA2-FB64-6E3C-04AE919959B0}"/>
+                <a16:creationId xmlns:a16="http://schemas.microsoft.com/office/drawing/2014/main" xmlns="" id="{74DDEDF1-6CA2-FB64-6E3C-04AE919959B0}"/>
               </a:ext>
             </a:extLst>
           </p:cNvPr>
@@ -9239,7 +9231,7 @@
           <p:cNvPr id="11" name="Imagem 10">
             <a:extLst>
               <a:ext uri="{FF2B5EF4-FFF2-40B4-BE49-F238E27FC236}">
-                <a16:creationId xmlns:a16="http://schemas.microsoft.com/office/drawing/2014/main" id="{4A6256F9-E71F-5C55-931F-920D3EE33E03}"/>
+                <a16:creationId xmlns:a16="http://schemas.microsoft.com/office/drawing/2014/main" xmlns="" id="{4A6256F9-E71F-5C55-931F-920D3EE33E03}"/>
               </a:ext>
             </a:extLst>
           </p:cNvPr>
@@ -9269,7 +9261,7 @@
           <p:cNvPr id="14" name="Imagem 13">
             <a:extLst>
               <a:ext uri="{FF2B5EF4-FFF2-40B4-BE49-F238E27FC236}">
-                <a16:creationId xmlns:a16="http://schemas.microsoft.com/office/drawing/2014/main" id="{9773687D-4F94-4B43-1BE0-A376E33CDA9C}"/>
+                <a16:creationId xmlns:a16="http://schemas.microsoft.com/office/drawing/2014/main" xmlns="" id="{9773687D-4F94-4B43-1BE0-A376E33CDA9C}"/>
               </a:ext>
             </a:extLst>
           </p:cNvPr>
@@ -9343,7 +9335,7 @@
           <p:cNvPr id="2" name="Título 1">
             <a:extLst>
               <a:ext uri="{FF2B5EF4-FFF2-40B4-BE49-F238E27FC236}">
-                <a16:creationId xmlns:a16="http://schemas.microsoft.com/office/drawing/2014/main" id="{5F09B89C-3183-4D52-981A-62798DDFF2B8}"/>
+                <a16:creationId xmlns:a16="http://schemas.microsoft.com/office/drawing/2014/main" xmlns="" id="{5F09B89C-3183-4D52-981A-62798DDFF2B8}"/>
               </a:ext>
             </a:extLst>
           </p:cNvPr>
@@ -9371,12 +9363,8 @@
               <a:t>Arduino nano </a:t>
             </a:r>
             <a:r>
-              <a:rPr lang="pt-BR" b="1" i="1" dirty="0" err="1"/>
-              <a:t>ble</a:t>
-            </a:r>
-            <a:r>
               <a:rPr lang="pt-BR" b="1" i="1" dirty="0"/>
-              <a:t> 33 </a:t>
+              <a:t>BLE 33 </a:t>
             </a:r>
             <a:r>
               <a:rPr lang="pt-BR" b="1" i="1" dirty="0" err="1"/>
@@ -9391,7 +9379,7 @@
           <p:cNvPr id="6" name="Espaço Reservado para Conteúdo 5" descr="Uma imagem contendo circuito, geladeira&#10;&#10;Descrição gerada automaticamente">
             <a:extLst>
               <a:ext uri="{FF2B5EF4-FFF2-40B4-BE49-F238E27FC236}">
-                <a16:creationId xmlns:a16="http://schemas.microsoft.com/office/drawing/2014/main" id="{1C7C2E39-67BD-BA03-6B16-C5FF70E26E05}"/>
+                <a16:creationId xmlns:a16="http://schemas.microsoft.com/office/drawing/2014/main" xmlns="" id="{1C7C2E39-67BD-BA03-6B16-C5FF70E26E05}"/>
               </a:ext>
             </a:extLst>
           </p:cNvPr>
@@ -9470,7 +9458,7 @@
           <p:cNvPr id="2" name="Título 1">
             <a:extLst>
               <a:ext uri="{FF2B5EF4-FFF2-40B4-BE49-F238E27FC236}">
-                <a16:creationId xmlns:a16="http://schemas.microsoft.com/office/drawing/2014/main" id="{5F09B89C-3183-4D52-981A-62798DDFF2B8}"/>
+                <a16:creationId xmlns:a16="http://schemas.microsoft.com/office/drawing/2014/main" xmlns="" id="{5F09B89C-3183-4D52-981A-62798DDFF2B8}"/>
               </a:ext>
             </a:extLst>
           </p:cNvPr>
@@ -9498,12 +9486,8 @@
               <a:t>Arduino nano </a:t>
             </a:r>
             <a:r>
-              <a:rPr lang="pt-BR" b="1" i="1" dirty="0" err="1"/>
-              <a:t>ble</a:t>
-            </a:r>
-            <a:r>
               <a:rPr lang="pt-BR" b="1" i="1" dirty="0"/>
-              <a:t> 33 </a:t>
+              <a:t>BLE 33 </a:t>
             </a:r>
             <a:r>
               <a:rPr lang="pt-BR" b="1" i="1" dirty="0" err="1"/>
@@ -9518,7 +9502,7 @@
           <p:cNvPr id="7" name="Espaço Reservado para Conteúdo 6">
             <a:extLst>
               <a:ext uri="{FF2B5EF4-FFF2-40B4-BE49-F238E27FC236}">
-                <a16:creationId xmlns:a16="http://schemas.microsoft.com/office/drawing/2014/main" id="{8436FF3C-D123-329E-F533-DDBF74135E49}"/>
+                <a16:creationId xmlns:a16="http://schemas.microsoft.com/office/drawing/2014/main" xmlns="" id="{8436FF3C-D123-329E-F533-DDBF74135E49}"/>
               </a:ext>
             </a:extLst>
           </p:cNvPr>
@@ -9591,7 +9575,7 @@
           <p:cNvPr id="2" name="Título 1">
             <a:extLst>
               <a:ext uri="{FF2B5EF4-FFF2-40B4-BE49-F238E27FC236}">
-                <a16:creationId xmlns:a16="http://schemas.microsoft.com/office/drawing/2014/main" id="{5F09B89C-3183-4D52-981A-62798DDFF2B8}"/>
+                <a16:creationId xmlns:a16="http://schemas.microsoft.com/office/drawing/2014/main" xmlns="" id="{5F09B89C-3183-4D52-981A-62798DDFF2B8}"/>
               </a:ext>
             </a:extLst>
           </p:cNvPr>
@@ -9619,12 +9603,8 @@
               <a:t>Arduino nano </a:t>
             </a:r>
             <a:r>
-              <a:rPr lang="pt-BR" b="1" i="1" dirty="0" err="1"/>
-              <a:t>ble</a:t>
-            </a:r>
-            <a:r>
               <a:rPr lang="pt-BR" b="1" i="1" dirty="0"/>
-              <a:t> 33 </a:t>
+              <a:t>BLE 33 </a:t>
             </a:r>
             <a:r>
               <a:rPr lang="pt-BR" b="1" i="1" dirty="0" err="1"/>
@@ -9639,7 +9619,7 @@
           <p:cNvPr id="11" name="Espaço Reservado para Conteúdo 10">
             <a:extLst>
               <a:ext uri="{FF2B5EF4-FFF2-40B4-BE49-F238E27FC236}">
-                <a16:creationId xmlns:a16="http://schemas.microsoft.com/office/drawing/2014/main" id="{D33CBD79-FD67-FF8E-BDC6-1D30CC7CFFBB}"/>
+                <a16:creationId xmlns:a16="http://schemas.microsoft.com/office/drawing/2014/main" xmlns="" id="{D33CBD79-FD67-FF8E-BDC6-1D30CC7CFFBB}"/>
               </a:ext>
             </a:extLst>
           </p:cNvPr>
@@ -9712,7 +9692,7 @@
           <p:cNvPr id="2" name="Título 1">
             <a:extLst>
               <a:ext uri="{FF2B5EF4-FFF2-40B4-BE49-F238E27FC236}">
-                <a16:creationId xmlns:a16="http://schemas.microsoft.com/office/drawing/2014/main" id="{5F09B89C-3183-4D52-981A-62798DDFF2B8}"/>
+                <a16:creationId xmlns:a16="http://schemas.microsoft.com/office/drawing/2014/main" xmlns="" id="{5F09B89C-3183-4D52-981A-62798DDFF2B8}"/>
               </a:ext>
             </a:extLst>
           </p:cNvPr>
@@ -9740,12 +9720,8 @@
               <a:t>Arduino nano </a:t>
             </a:r>
             <a:r>
-              <a:rPr lang="pt-BR" b="1" i="1" dirty="0" err="1"/>
-              <a:t>ble</a:t>
-            </a:r>
-            <a:r>
               <a:rPr lang="pt-BR" b="1" i="1" dirty="0"/>
-              <a:t> 33 </a:t>
+              <a:t>BLE 33 </a:t>
             </a:r>
             <a:r>
               <a:rPr lang="pt-BR" b="1" i="1" dirty="0" err="1"/>
@@ -9760,7 +9736,7 @@
           <p:cNvPr id="7" name="Espaço Reservado para Conteúdo 6">
             <a:extLst>
               <a:ext uri="{FF2B5EF4-FFF2-40B4-BE49-F238E27FC236}">
-                <a16:creationId xmlns:a16="http://schemas.microsoft.com/office/drawing/2014/main" id="{EE6CC178-193F-4F49-3930-5E4D43248365}"/>
+                <a16:creationId xmlns:a16="http://schemas.microsoft.com/office/drawing/2014/main" xmlns="" id="{EE6CC178-193F-4F49-3930-5E4D43248365}"/>
               </a:ext>
             </a:extLst>
           </p:cNvPr>
@@ -9833,7 +9809,7 @@
           <p:cNvPr id="2" name="Título 1">
             <a:extLst>
               <a:ext uri="{FF2B5EF4-FFF2-40B4-BE49-F238E27FC236}">
-                <a16:creationId xmlns:a16="http://schemas.microsoft.com/office/drawing/2014/main" id="{5F09B89C-3183-4D52-981A-62798DDFF2B8}"/>
+                <a16:creationId xmlns:a16="http://schemas.microsoft.com/office/drawing/2014/main" xmlns="" id="{5F09B89C-3183-4D52-981A-62798DDFF2B8}"/>
               </a:ext>
             </a:extLst>
           </p:cNvPr>
@@ -9861,12 +9837,8 @@
               <a:t>Arduino nano </a:t>
             </a:r>
             <a:r>
-              <a:rPr lang="pt-BR" b="1" i="1" dirty="0" err="1"/>
-              <a:t>ble</a:t>
-            </a:r>
-            <a:r>
               <a:rPr lang="pt-BR" b="1" i="1" dirty="0"/>
-              <a:t> 33 </a:t>
+              <a:t>BLE 33 </a:t>
             </a:r>
             <a:r>
               <a:rPr lang="pt-BR" b="1" i="1" dirty="0" err="1"/>
@@ -9881,7 +9853,7 @@
           <p:cNvPr id="4" name="Espaço Reservado para Conteúdo 3">
             <a:extLst>
               <a:ext uri="{FF2B5EF4-FFF2-40B4-BE49-F238E27FC236}">
-                <a16:creationId xmlns:a16="http://schemas.microsoft.com/office/drawing/2014/main" id="{9F2596B6-9FD2-2F7D-80F1-B2F04E2D8D08}"/>
+                <a16:creationId xmlns:a16="http://schemas.microsoft.com/office/drawing/2014/main" xmlns="" id="{9F2596B6-9FD2-2F7D-80F1-B2F04E2D8D08}"/>
               </a:ext>
             </a:extLst>
           </p:cNvPr>
@@ -9922,7 +9894,7 @@
           <p:cNvPr id="11" name="Imagem 10">
             <a:extLst>
               <a:ext uri="{FF2B5EF4-FFF2-40B4-BE49-F238E27FC236}">
-                <a16:creationId xmlns:a16="http://schemas.microsoft.com/office/drawing/2014/main" id="{4B572F80-ADC4-F5FA-7F57-5C9B41F775A6}"/>
+                <a16:creationId xmlns:a16="http://schemas.microsoft.com/office/drawing/2014/main" xmlns="" id="{4B572F80-ADC4-F5FA-7F57-5C9B41F775A6}"/>
               </a:ext>
             </a:extLst>
           </p:cNvPr>
@@ -9952,7 +9924,7 @@
           <p:cNvPr id="13" name="Imagem 12">
             <a:extLst>
               <a:ext uri="{FF2B5EF4-FFF2-40B4-BE49-F238E27FC236}">
-                <a16:creationId xmlns:a16="http://schemas.microsoft.com/office/drawing/2014/main" id="{8E9E28C1-4D92-B334-3211-B30C0F0422AB}"/>
+                <a16:creationId xmlns:a16="http://schemas.microsoft.com/office/drawing/2014/main" xmlns="" id="{8E9E28C1-4D92-B334-3211-B30C0F0422AB}"/>
               </a:ext>
             </a:extLst>
           </p:cNvPr>
@@ -10026,7 +9998,7 @@
           <p:cNvPr id="2" name="Título 1">
             <a:extLst>
               <a:ext uri="{FF2B5EF4-FFF2-40B4-BE49-F238E27FC236}">
-                <a16:creationId xmlns:a16="http://schemas.microsoft.com/office/drawing/2014/main" id="{5F09B89C-3183-4D52-981A-62798DDFF2B8}"/>
+                <a16:creationId xmlns:a16="http://schemas.microsoft.com/office/drawing/2014/main" xmlns="" id="{5F09B89C-3183-4D52-981A-62798DDFF2B8}"/>
               </a:ext>
             </a:extLst>
           </p:cNvPr>
@@ -10054,12 +10026,8 @@
               <a:t>Arduino nano </a:t>
             </a:r>
             <a:r>
-              <a:rPr lang="pt-BR" b="1" i="1" dirty="0" err="1"/>
-              <a:t>ble</a:t>
-            </a:r>
-            <a:r>
               <a:rPr lang="pt-BR" b="1" i="1" dirty="0"/>
-              <a:t> 33 </a:t>
+              <a:t>BLE 33 </a:t>
             </a:r>
             <a:r>
               <a:rPr lang="pt-BR" b="1" i="1" dirty="0" err="1"/>
@@ -10074,7 +10042,7 @@
           <p:cNvPr id="4" name="Espaço Reservado para Conteúdo 3">
             <a:extLst>
               <a:ext uri="{FF2B5EF4-FFF2-40B4-BE49-F238E27FC236}">
-                <a16:creationId xmlns:a16="http://schemas.microsoft.com/office/drawing/2014/main" id="{9F2596B6-9FD2-2F7D-80F1-B2F04E2D8D08}"/>
+                <a16:creationId xmlns:a16="http://schemas.microsoft.com/office/drawing/2014/main" xmlns="" id="{9F2596B6-9FD2-2F7D-80F1-B2F04E2D8D08}"/>
               </a:ext>
             </a:extLst>
           </p:cNvPr>
@@ -10111,7 +10079,7 @@
           <p:cNvPr id="6" name="Imagem 5">
             <a:extLst>
               <a:ext uri="{FF2B5EF4-FFF2-40B4-BE49-F238E27FC236}">
-                <a16:creationId xmlns:a16="http://schemas.microsoft.com/office/drawing/2014/main" id="{438824B7-0FF3-D539-6E31-E334D5EE4F94}"/>
+                <a16:creationId xmlns:a16="http://schemas.microsoft.com/office/drawing/2014/main" xmlns="" id="{438824B7-0FF3-D539-6E31-E334D5EE4F94}"/>
               </a:ext>
             </a:extLst>
           </p:cNvPr>
